--- a/docs/pptx/auc3/ritu-auc3-linsubhr-ratio-akikdigo_10pct.pptx
+++ b/docs/pptx/auc3/ritu-auc3-linsubhr-ratio-akikdigo_10pct.pptx
@@ -2443,7 +2443,7 @@
           </p:nvSpPr>
           <p:spPr>
             <a:xfrm>
-              <a:off x="1012387" y="2073503"/>
+              <a:off x="1013326" y="2073503"/>
               <a:ext cx="0" cy="3649639"/>
             </a:xfrm>
             <a:custGeom>
@@ -2486,7 +2486,7 @@
           </p:nvSpPr>
           <p:spPr>
             <a:xfrm>
-              <a:off x="1914572" y="2073503"/>
+              <a:off x="1915271" y="2073503"/>
               <a:ext cx="0" cy="3649639"/>
             </a:xfrm>
             <a:custGeom>
@@ -2529,7 +2529,7 @@
           </p:nvSpPr>
           <p:spPr>
             <a:xfrm>
-              <a:off x="2816756" y="2073503"/>
+              <a:off x="2817216" y="2073503"/>
               <a:ext cx="0" cy="3649639"/>
             </a:xfrm>
             <a:custGeom>
@@ -2572,7 +2572,7 @@
           </p:nvSpPr>
           <p:spPr>
             <a:xfrm>
-              <a:off x="3718941" y="2073503"/>
+              <a:off x="3719160" y="2073503"/>
               <a:ext cx="0" cy="3649639"/>
             </a:xfrm>
             <a:custGeom>
@@ -2615,7 +2615,7 @@
           </p:nvSpPr>
           <p:spPr>
             <a:xfrm>
-              <a:off x="4621125" y="2073503"/>
+              <a:off x="4621105" y="2073503"/>
               <a:ext cx="0" cy="3649639"/>
             </a:xfrm>
             <a:custGeom>
@@ -2658,7 +2658,7 @@
           </p:nvSpPr>
           <p:spPr>
             <a:xfrm>
-              <a:off x="5523310" y="2073503"/>
+              <a:off x="5523050" y="2073503"/>
               <a:ext cx="0" cy="3649639"/>
             </a:xfrm>
             <a:custGeom>
@@ -2701,7 +2701,7 @@
           </p:nvSpPr>
           <p:spPr>
             <a:xfrm>
-              <a:off x="6425495" y="2073503"/>
+              <a:off x="6424995" y="2073503"/>
               <a:ext cx="0" cy="3649639"/>
             </a:xfrm>
             <a:custGeom>
@@ -2744,7 +2744,7 @@
           </p:nvSpPr>
           <p:spPr>
             <a:xfrm>
-              <a:off x="7327679" y="2073503"/>
+              <a:off x="7326940" y="2073503"/>
               <a:ext cx="0" cy="3649639"/>
             </a:xfrm>
             <a:custGeom>
@@ -2787,7 +2787,7 @@
           </p:nvSpPr>
           <p:spPr>
             <a:xfrm>
-              <a:off x="8229864" y="2073503"/>
+              <a:off x="8228885" y="2073503"/>
               <a:ext cx="0" cy="3649639"/>
             </a:xfrm>
             <a:custGeom>
@@ -3045,7 +3045,7 @@
           </p:nvSpPr>
           <p:spPr>
             <a:xfrm>
-              <a:off x="1463479" y="2073503"/>
+              <a:off x="1464298" y="2073503"/>
               <a:ext cx="0" cy="3649639"/>
             </a:xfrm>
             <a:custGeom>
@@ -3088,7 +3088,7 @@
           </p:nvSpPr>
           <p:spPr>
             <a:xfrm>
-              <a:off x="2365664" y="2073503"/>
+              <a:off x="2366243" y="2073503"/>
               <a:ext cx="0" cy="3649639"/>
             </a:xfrm>
             <a:custGeom>
@@ -3131,7 +3131,7 @@
           </p:nvSpPr>
           <p:spPr>
             <a:xfrm>
-              <a:off x="3267849" y="2073503"/>
+              <a:off x="3268188" y="2073503"/>
               <a:ext cx="0" cy="3649639"/>
             </a:xfrm>
             <a:custGeom>
@@ -3174,7 +3174,7 @@
           </p:nvSpPr>
           <p:spPr>
             <a:xfrm>
-              <a:off x="4170033" y="2073503"/>
+              <a:off x="4170133" y="2073503"/>
               <a:ext cx="0" cy="3649639"/>
             </a:xfrm>
             <a:custGeom>
@@ -3217,7 +3217,7 @@
           </p:nvSpPr>
           <p:spPr>
             <a:xfrm>
-              <a:off x="5072218" y="2073503"/>
+              <a:off x="5072078" y="2073503"/>
               <a:ext cx="0" cy="3649639"/>
             </a:xfrm>
             <a:custGeom>
@@ -3260,7 +3260,7 @@
           </p:nvSpPr>
           <p:spPr>
             <a:xfrm>
-              <a:off x="5974402" y="2073503"/>
+              <a:off x="5974022" y="2073503"/>
               <a:ext cx="0" cy="3649639"/>
             </a:xfrm>
             <a:custGeom>
@@ -3303,7 +3303,7 @@
           </p:nvSpPr>
           <p:spPr>
             <a:xfrm>
-              <a:off x="6876587" y="2073503"/>
+              <a:off x="6875967" y="2073503"/>
               <a:ext cx="0" cy="3649639"/>
             </a:xfrm>
             <a:custGeom>
@@ -3346,7 +3346,7 @@
           </p:nvSpPr>
           <p:spPr>
             <a:xfrm>
-              <a:off x="7778772" y="2073503"/>
+              <a:off x="7777912" y="2073503"/>
               <a:ext cx="0" cy="3649639"/>
             </a:xfrm>
             <a:custGeom>
@@ -3397,133 +3397,130 @@
               <a:pathLst>
                 <a:path w="7090630" h="3483746">
                   <a:moveTo>
-                    <a:pt x="2577917" y="0"/>
+                    <a:pt x="2583809" y="0"/>
                   </a:moveTo>
                   <a:lnTo>
-                    <a:pt x="2578410" y="6726"/>
-                  </a:lnTo>
-                  <a:lnTo>
-                    <a:pt x="2650033" y="769532"/>
-                  </a:lnTo>
-                  <a:lnTo>
-                    <a:pt x="2721655" y="1364991"/>
-                  </a:lnTo>
-                  <a:lnTo>
-                    <a:pt x="2793278" y="1829814"/>
-                  </a:lnTo>
-                  <a:lnTo>
-                    <a:pt x="2864901" y="2192662"/>
-                  </a:lnTo>
-                  <a:lnTo>
-                    <a:pt x="2936523" y="2475907"/>
-                  </a:lnTo>
-                  <a:lnTo>
-                    <a:pt x="3008146" y="2646874"/>
-                  </a:lnTo>
-                  <a:lnTo>
-                    <a:pt x="3079768" y="2611289"/>
-                  </a:lnTo>
-                  <a:lnTo>
-                    <a:pt x="3151391" y="2574192"/>
-                  </a:lnTo>
-                  <a:lnTo>
-                    <a:pt x="3223013" y="2535516"/>
-                  </a:lnTo>
-                  <a:lnTo>
-                    <a:pt x="3294636" y="2495197"/>
-                  </a:lnTo>
-                  <a:lnTo>
-                    <a:pt x="3366258" y="2453163"/>
-                  </a:lnTo>
-                  <a:lnTo>
-                    <a:pt x="3437881" y="2409341"/>
-                  </a:lnTo>
-                  <a:lnTo>
-                    <a:pt x="3509503" y="2363656"/>
-                  </a:lnTo>
-                  <a:lnTo>
-                    <a:pt x="3581126" y="2316029"/>
-                  </a:lnTo>
-                  <a:lnTo>
-                    <a:pt x="3652748" y="2266376"/>
-                  </a:lnTo>
-                  <a:lnTo>
-                    <a:pt x="3724371" y="2214612"/>
-                  </a:lnTo>
-                  <a:lnTo>
-                    <a:pt x="3795993" y="2160647"/>
-                  </a:lnTo>
-                  <a:lnTo>
-                    <a:pt x="3867616" y="2104388"/>
-                  </a:lnTo>
-                  <a:lnTo>
-                    <a:pt x="3939238" y="2045736"/>
-                  </a:lnTo>
-                  <a:lnTo>
-                    <a:pt x="4010861" y="1984590"/>
-                  </a:lnTo>
-                  <a:lnTo>
-                    <a:pt x="4082483" y="1920844"/>
-                  </a:lnTo>
-                  <a:lnTo>
-                    <a:pt x="4154106" y="1854388"/>
-                  </a:lnTo>
-                  <a:lnTo>
-                    <a:pt x="4225729" y="1785106"/>
-                  </a:lnTo>
-                  <a:lnTo>
-                    <a:pt x="4297351" y="1712878"/>
-                  </a:lnTo>
-                  <a:lnTo>
-                    <a:pt x="4368974" y="1637579"/>
-                  </a:lnTo>
-                  <a:lnTo>
-                    <a:pt x="4440596" y="1559078"/>
-                  </a:lnTo>
-                  <a:lnTo>
-                    <a:pt x="4512219" y="1477239"/>
-                  </a:lnTo>
-                  <a:lnTo>
-                    <a:pt x="4583841" y="1391920"/>
-                  </a:lnTo>
-                  <a:lnTo>
-                    <a:pt x="4655464" y="1302973"/>
-                  </a:lnTo>
-                  <a:lnTo>
-                    <a:pt x="4727086" y="1210245"/>
-                  </a:lnTo>
-                  <a:lnTo>
-                    <a:pt x="4798709" y="1113573"/>
-                  </a:lnTo>
-                  <a:lnTo>
-                    <a:pt x="4870331" y="1012791"/>
-                  </a:lnTo>
-                  <a:lnTo>
-                    <a:pt x="4941954" y="907723"/>
-                  </a:lnTo>
-                  <a:lnTo>
-                    <a:pt x="5013576" y="798188"/>
-                  </a:lnTo>
-                  <a:lnTo>
-                    <a:pt x="5085199" y="683995"/>
-                  </a:lnTo>
-                  <a:lnTo>
-                    <a:pt x="5156821" y="564947"/>
-                  </a:lnTo>
-                  <a:lnTo>
-                    <a:pt x="5228444" y="440836"/>
-                  </a:lnTo>
-                  <a:lnTo>
-                    <a:pt x="5300066" y="311448"/>
-                  </a:lnTo>
-                  <a:lnTo>
-                    <a:pt x="5371689" y="176559"/>
-                  </a:lnTo>
-                  <a:lnTo>
-                    <a:pt x="5443311" y="35934"/>
-                  </a:lnTo>
-                  <a:lnTo>
-                    <a:pt x="5460867" y="0"/>
+                    <a:pt x="2650033" y="718728"/>
+                  </a:lnTo>
+                  <a:lnTo>
+                    <a:pt x="2721655" y="1325474"/>
+                  </a:lnTo>
+                  <a:lnTo>
+                    <a:pt x="2793278" y="1799078"/>
+                  </a:lnTo>
+                  <a:lnTo>
+                    <a:pt x="2864901" y="2168756"/>
+                  </a:lnTo>
+                  <a:lnTo>
+                    <a:pt x="2936523" y="2457313"/>
+                  </a:lnTo>
+                  <a:lnTo>
+                    <a:pt x="3008146" y="2649433"/>
+                  </a:lnTo>
+                  <a:lnTo>
+                    <a:pt x="3079768" y="2613948"/>
+                  </a:lnTo>
+                  <a:lnTo>
+                    <a:pt x="3151391" y="2576953"/>
+                  </a:lnTo>
+                  <a:lnTo>
+                    <a:pt x="3223013" y="2538385"/>
+                  </a:lnTo>
+                  <a:lnTo>
+                    <a:pt x="3294636" y="2498176"/>
+                  </a:lnTo>
+                  <a:lnTo>
+                    <a:pt x="3366258" y="2456257"/>
+                  </a:lnTo>
+                  <a:lnTo>
+                    <a:pt x="3437881" y="2412555"/>
+                  </a:lnTo>
+                  <a:lnTo>
+                    <a:pt x="3509503" y="2366995"/>
+                  </a:lnTo>
+                  <a:lnTo>
+                    <a:pt x="3581126" y="2319496"/>
+                  </a:lnTo>
+                  <a:lnTo>
+                    <a:pt x="3652748" y="2269978"/>
+                  </a:lnTo>
+                  <a:lnTo>
+                    <a:pt x="3724371" y="2218353"/>
+                  </a:lnTo>
+                  <a:lnTo>
+                    <a:pt x="3795993" y="2164532"/>
+                  </a:lnTo>
+                  <a:lnTo>
+                    <a:pt x="3867616" y="2108423"/>
+                  </a:lnTo>
+                  <a:lnTo>
+                    <a:pt x="3939238" y="2049926"/>
+                  </a:lnTo>
+                  <a:lnTo>
+                    <a:pt x="4010861" y="1988942"/>
+                  </a:lnTo>
+                  <a:lnTo>
+                    <a:pt x="4082483" y="1925364"/>
+                  </a:lnTo>
+                  <a:lnTo>
+                    <a:pt x="4154106" y="1859082"/>
+                  </a:lnTo>
+                  <a:lnTo>
+                    <a:pt x="4225729" y="1789981"/>
+                  </a:lnTo>
+                  <a:lnTo>
+                    <a:pt x="4297351" y="1717941"/>
+                  </a:lnTo>
+                  <a:lnTo>
+                    <a:pt x="4368974" y="1642836"/>
+                  </a:lnTo>
+                  <a:lnTo>
+                    <a:pt x="4440596" y="1564538"/>
+                  </a:lnTo>
+                  <a:lnTo>
+                    <a:pt x="4512219" y="1482909"/>
+                  </a:lnTo>
+                  <a:lnTo>
+                    <a:pt x="4583841" y="1397808"/>
+                  </a:lnTo>
+                  <a:lnTo>
+                    <a:pt x="4655464" y="1309087"/>
+                  </a:lnTo>
+                  <a:lnTo>
+                    <a:pt x="4727086" y="1216593"/>
+                  </a:lnTo>
+                  <a:lnTo>
+                    <a:pt x="4798709" y="1120165"/>
+                  </a:lnTo>
+                  <a:lnTo>
+                    <a:pt x="4870331" y="1019636"/>
+                  </a:lnTo>
+                  <a:lnTo>
+                    <a:pt x="4941954" y="914831"/>
+                  </a:lnTo>
+                  <a:lnTo>
+                    <a:pt x="5013576" y="805568"/>
+                  </a:lnTo>
+                  <a:lnTo>
+                    <a:pt x="5085199" y="691658"/>
+                  </a:lnTo>
+                  <a:lnTo>
+                    <a:pt x="5156821" y="572903"/>
+                  </a:lnTo>
+                  <a:lnTo>
+                    <a:pt x="5228444" y="449098"/>
+                  </a:lnTo>
+                  <a:lnTo>
+                    <a:pt x="5300066" y="320026"/>
+                  </a:lnTo>
+                  <a:lnTo>
+                    <a:pt x="5371689" y="185465"/>
+                  </a:lnTo>
+                  <a:lnTo>
+                    <a:pt x="5443311" y="45180"/>
+                  </a:lnTo>
+                  <a:lnTo>
+                    <a:pt x="5465437" y="0"/>
                   </a:lnTo>
                   <a:lnTo>
                     <a:pt x="7090630" y="0"/>
@@ -3562,7 +3559,7 @@
                     <a:pt x="6374404" y="3483739"/>
                   </a:lnTo>
                   <a:lnTo>
-                    <a:pt x="6302782" y="3483738"/>
+                    <a:pt x="6302782" y="3483737"/>
                   </a:lnTo>
                   <a:lnTo>
                     <a:pt x="6231159" y="3483735"/>
@@ -3571,262 +3568,262 @@
                     <a:pt x="6159537" y="3483732"/>
                   </a:lnTo>
                   <a:lnTo>
-                    <a:pt x="6087914" y="3483728"/>
-                  </a:lnTo>
-                  <a:lnTo>
-                    <a:pt x="6016292" y="3483723"/>
-                  </a:lnTo>
-                  <a:lnTo>
-                    <a:pt x="5944669" y="3483716"/>
+                    <a:pt x="6087914" y="3483727"/>
+                  </a:lnTo>
+                  <a:lnTo>
+                    <a:pt x="6016292" y="3483722"/>
+                  </a:lnTo>
+                  <a:lnTo>
+                    <a:pt x="5944669" y="3483715"/>
                   </a:lnTo>
                   <a:lnTo>
                     <a:pt x="5873047" y="3483707"/>
                   </a:lnTo>
                   <a:lnTo>
-                    <a:pt x="5801424" y="3483696"/>
-                  </a:lnTo>
-                  <a:lnTo>
-                    <a:pt x="5729802" y="3483682"/>
-                  </a:lnTo>
-                  <a:lnTo>
-                    <a:pt x="5658179" y="3483664"/>
-                  </a:lnTo>
-                  <a:lnTo>
-                    <a:pt x="5586557" y="3483641"/>
-                  </a:lnTo>
-                  <a:lnTo>
-                    <a:pt x="5514934" y="3483611"/>
-                  </a:lnTo>
-                  <a:lnTo>
-                    <a:pt x="5443311" y="3483573"/>
-                  </a:lnTo>
-                  <a:lnTo>
-                    <a:pt x="5371689" y="3483524"/>
-                  </a:lnTo>
-                  <a:lnTo>
-                    <a:pt x="5300066" y="3483462"/>
-                  </a:lnTo>
-                  <a:lnTo>
-                    <a:pt x="5228444" y="3483382"/>
-                  </a:lnTo>
-                  <a:lnTo>
-                    <a:pt x="5156821" y="3483280"/>
-                  </a:lnTo>
-                  <a:lnTo>
-                    <a:pt x="5085199" y="3483149"/>
-                  </a:lnTo>
-                  <a:lnTo>
-                    <a:pt x="5013576" y="3482981"/>
-                  </a:lnTo>
-                  <a:lnTo>
-                    <a:pt x="4941954" y="3482766"/>
-                  </a:lnTo>
-                  <a:lnTo>
-                    <a:pt x="4870331" y="3482490"/>
-                  </a:lnTo>
-                  <a:lnTo>
-                    <a:pt x="4798709" y="3482137"/>
-                  </a:lnTo>
-                  <a:lnTo>
-                    <a:pt x="4727086" y="3481684"/>
-                  </a:lnTo>
-                  <a:lnTo>
-                    <a:pt x="4655464" y="3481105"/>
-                  </a:lnTo>
-                  <a:lnTo>
-                    <a:pt x="4583841" y="3480362"/>
-                  </a:lnTo>
-                  <a:lnTo>
-                    <a:pt x="4512219" y="3479411"/>
-                  </a:lnTo>
-                  <a:lnTo>
-                    <a:pt x="4440596" y="3478193"/>
-                  </a:lnTo>
-                  <a:lnTo>
-                    <a:pt x="4368974" y="3476632"/>
-                  </a:lnTo>
-                  <a:lnTo>
-                    <a:pt x="4297351" y="3474633"/>
-                  </a:lnTo>
-                  <a:lnTo>
-                    <a:pt x="4225729" y="3472071"/>
-                  </a:lnTo>
-                  <a:lnTo>
-                    <a:pt x="4154106" y="3468790"/>
-                  </a:lnTo>
-                  <a:lnTo>
-                    <a:pt x="4082483" y="3464587"/>
-                  </a:lnTo>
-                  <a:lnTo>
-                    <a:pt x="4010861" y="3459203"/>
-                  </a:lnTo>
-                  <a:lnTo>
-                    <a:pt x="3939238" y="3452305"/>
-                  </a:lnTo>
-                  <a:lnTo>
-                    <a:pt x="3867616" y="3443468"/>
-                  </a:lnTo>
-                  <a:lnTo>
-                    <a:pt x="3795993" y="3432148"/>
-                  </a:lnTo>
-                  <a:lnTo>
-                    <a:pt x="3724371" y="3417647"/>
-                  </a:lnTo>
-                  <a:lnTo>
-                    <a:pt x="3652748" y="3399071"/>
-                  </a:lnTo>
-                  <a:lnTo>
-                    <a:pt x="3581126" y="3375273"/>
-                  </a:lnTo>
-                  <a:lnTo>
-                    <a:pt x="3509503" y="3344788"/>
-                  </a:lnTo>
-                  <a:lnTo>
-                    <a:pt x="3437881" y="3305734"/>
-                  </a:lnTo>
-                  <a:lnTo>
-                    <a:pt x="3366258" y="3255706"/>
-                  </a:lnTo>
-                  <a:lnTo>
-                    <a:pt x="3294636" y="3191617"/>
-                  </a:lnTo>
-                  <a:lnTo>
-                    <a:pt x="3223013" y="3109516"/>
-                  </a:lnTo>
-                  <a:lnTo>
-                    <a:pt x="3151391" y="3004342"/>
-                  </a:lnTo>
-                  <a:lnTo>
-                    <a:pt x="3079768" y="2869610"/>
-                  </a:lnTo>
-                  <a:lnTo>
-                    <a:pt x="3008146" y="2697012"/>
-                  </a:lnTo>
-                  <a:lnTo>
-                    <a:pt x="2936523" y="2681007"/>
-                  </a:lnTo>
-                  <a:lnTo>
-                    <a:pt x="2864901" y="2713749"/>
-                  </a:lnTo>
-                  <a:lnTo>
-                    <a:pt x="2793278" y="2745154"/>
-                  </a:lnTo>
-                  <a:lnTo>
-                    <a:pt x="2721655" y="2775279"/>
-                  </a:lnTo>
-                  <a:lnTo>
-                    <a:pt x="2650033" y="2804175"/>
-                  </a:lnTo>
-                  <a:lnTo>
-                    <a:pt x="2578410" y="2831893"/>
-                  </a:lnTo>
-                  <a:lnTo>
-                    <a:pt x="2506788" y="2858480"/>
-                  </a:lnTo>
-                  <a:lnTo>
-                    <a:pt x="2435165" y="2883982"/>
-                  </a:lnTo>
-                  <a:lnTo>
-                    <a:pt x="2363543" y="2908445"/>
-                  </a:lnTo>
-                  <a:lnTo>
-                    <a:pt x="2291920" y="2931909"/>
-                  </a:lnTo>
-                  <a:lnTo>
-                    <a:pt x="2220298" y="2954417"/>
-                  </a:lnTo>
-                  <a:lnTo>
-                    <a:pt x="2148675" y="2976007"/>
-                  </a:lnTo>
-                  <a:lnTo>
-                    <a:pt x="2077053" y="2996716"/>
-                  </a:lnTo>
-                  <a:lnTo>
-                    <a:pt x="2005430" y="3016580"/>
-                  </a:lnTo>
-                  <a:lnTo>
-                    <a:pt x="1933808" y="3035634"/>
-                  </a:lnTo>
-                  <a:lnTo>
-                    <a:pt x="1862185" y="3053911"/>
-                  </a:lnTo>
-                  <a:lnTo>
-                    <a:pt x="1790563" y="3071443"/>
-                  </a:lnTo>
-                  <a:lnTo>
-                    <a:pt x="1718940" y="3088260"/>
-                  </a:lnTo>
-                  <a:lnTo>
-                    <a:pt x="1647318" y="3104390"/>
-                  </a:lnTo>
-                  <a:lnTo>
-                    <a:pt x="1575695" y="3119863"/>
-                  </a:lnTo>
-                  <a:lnTo>
-                    <a:pt x="1504073" y="3134705"/>
-                  </a:lnTo>
-                  <a:lnTo>
-                    <a:pt x="1432450" y="3148941"/>
-                  </a:lnTo>
-                  <a:lnTo>
-                    <a:pt x="1360827" y="3162596"/>
-                  </a:lnTo>
-                  <a:lnTo>
-                    <a:pt x="1289205" y="3175695"/>
-                  </a:lnTo>
-                  <a:lnTo>
-                    <a:pt x="1217582" y="3188260"/>
-                  </a:lnTo>
-                  <a:lnTo>
-                    <a:pt x="1145960" y="3200311"/>
-                  </a:lnTo>
-                  <a:lnTo>
-                    <a:pt x="1074337" y="3211872"/>
-                  </a:lnTo>
-                  <a:lnTo>
-                    <a:pt x="1002715" y="3222961"/>
-                  </a:lnTo>
-                  <a:lnTo>
-                    <a:pt x="931092" y="3233597"/>
-                  </a:lnTo>
-                  <a:lnTo>
-                    <a:pt x="859470" y="3243800"/>
-                  </a:lnTo>
-                  <a:lnTo>
-                    <a:pt x="787847" y="3253587"/>
-                  </a:lnTo>
-                  <a:lnTo>
-                    <a:pt x="716225" y="3262974"/>
-                  </a:lnTo>
-                  <a:lnTo>
-                    <a:pt x="644602" y="3271979"/>
-                  </a:lnTo>
-                  <a:lnTo>
-                    <a:pt x="572980" y="3280616"/>
-                  </a:lnTo>
-                  <a:lnTo>
-                    <a:pt x="501357" y="3288901"/>
-                  </a:lnTo>
-                  <a:lnTo>
-                    <a:pt x="429735" y="3296848"/>
-                  </a:lnTo>
-                  <a:lnTo>
-                    <a:pt x="358112" y="3304471"/>
-                  </a:lnTo>
-                  <a:lnTo>
-                    <a:pt x="286490" y="3311783"/>
-                  </a:lnTo>
-                  <a:lnTo>
-                    <a:pt x="214867" y="3318797"/>
-                  </a:lnTo>
-                  <a:lnTo>
-                    <a:pt x="143245" y="3325525"/>
-                  </a:lnTo>
-                  <a:lnTo>
-                    <a:pt x="71622" y="3331978"/>
-                  </a:lnTo>
-                  <a:lnTo>
-                    <a:pt x="0" y="3338168"/>
+                    <a:pt x="5801424" y="3483695"/>
+                  </a:lnTo>
+                  <a:lnTo>
+                    <a:pt x="5729802" y="3483681"/>
+                  </a:lnTo>
+                  <a:lnTo>
+                    <a:pt x="5658179" y="3483663"/>
+                  </a:lnTo>
+                  <a:lnTo>
+                    <a:pt x="5586557" y="3483639"/>
+                  </a:lnTo>
+                  <a:lnTo>
+                    <a:pt x="5514934" y="3483609"/>
+                  </a:lnTo>
+                  <a:lnTo>
+                    <a:pt x="5443311" y="3483570"/>
+                  </a:lnTo>
+                  <a:lnTo>
+                    <a:pt x="5371689" y="3483521"/>
+                  </a:lnTo>
+                  <a:lnTo>
+                    <a:pt x="5300066" y="3483457"/>
+                  </a:lnTo>
+                  <a:lnTo>
+                    <a:pt x="5228444" y="3483376"/>
+                  </a:lnTo>
+                  <a:lnTo>
+                    <a:pt x="5156821" y="3483272"/>
+                  </a:lnTo>
+                  <a:lnTo>
+                    <a:pt x="5085199" y="3483139"/>
+                  </a:lnTo>
+                  <a:lnTo>
+                    <a:pt x="5013576" y="3482968"/>
+                  </a:lnTo>
+                  <a:lnTo>
+                    <a:pt x="4941954" y="3482749"/>
+                  </a:lnTo>
+                  <a:lnTo>
+                    <a:pt x="4870331" y="3482469"/>
+                  </a:lnTo>
+                  <a:lnTo>
+                    <a:pt x="4798709" y="3482110"/>
+                  </a:lnTo>
+                  <a:lnTo>
+                    <a:pt x="4727086" y="3481650"/>
+                  </a:lnTo>
+                  <a:lnTo>
+                    <a:pt x="4655464" y="3481060"/>
+                  </a:lnTo>
+                  <a:lnTo>
+                    <a:pt x="4583841" y="3480305"/>
+                  </a:lnTo>
+                  <a:lnTo>
+                    <a:pt x="4512219" y="3479338"/>
+                  </a:lnTo>
+                  <a:lnTo>
+                    <a:pt x="4440596" y="3478098"/>
+                  </a:lnTo>
+                  <a:lnTo>
+                    <a:pt x="4368974" y="3476510"/>
+                  </a:lnTo>
+                  <a:lnTo>
+                    <a:pt x="4297351" y="3474476"/>
+                  </a:lnTo>
+                  <a:lnTo>
+                    <a:pt x="4225729" y="3471870"/>
+                  </a:lnTo>
+                  <a:lnTo>
+                    <a:pt x="4154106" y="3468531"/>
+                  </a:lnTo>
+                  <a:lnTo>
+                    <a:pt x="4082483" y="3464254"/>
+                  </a:lnTo>
+                  <a:lnTo>
+                    <a:pt x="4010861" y="3458774"/>
+                  </a:lnTo>
+                  <a:lnTo>
+                    <a:pt x="3939238" y="3451754"/>
+                  </a:lnTo>
+                  <a:lnTo>
+                    <a:pt x="3867616" y="3442760"/>
+                  </a:lnTo>
+                  <a:lnTo>
+                    <a:pt x="3795993" y="3431238"/>
+                  </a:lnTo>
+                  <a:lnTo>
+                    <a:pt x="3724371" y="3416476"/>
+                  </a:lnTo>
+                  <a:lnTo>
+                    <a:pt x="3652748" y="3397565"/>
+                  </a:lnTo>
+                  <a:lnTo>
+                    <a:pt x="3581126" y="3373337"/>
+                  </a:lnTo>
+                  <a:lnTo>
+                    <a:pt x="3509503" y="3342298"/>
+                  </a:lnTo>
+                  <a:lnTo>
+                    <a:pt x="3437881" y="3302534"/>
+                  </a:lnTo>
+                  <a:lnTo>
+                    <a:pt x="3366258" y="3251590"/>
+                  </a:lnTo>
+                  <a:lnTo>
+                    <a:pt x="3294636" y="3186325"/>
+                  </a:lnTo>
+                  <a:lnTo>
+                    <a:pt x="3223013" y="3102712"/>
+                  </a:lnTo>
+                  <a:lnTo>
+                    <a:pt x="3151391" y="2995594"/>
+                  </a:lnTo>
+                  <a:lnTo>
+                    <a:pt x="3079768" y="2858362"/>
+                  </a:lnTo>
+                  <a:lnTo>
+                    <a:pt x="3008146" y="2682550"/>
+                  </a:lnTo>
+                  <a:lnTo>
+                    <a:pt x="2936523" y="2683471"/>
+                  </a:lnTo>
+                  <a:lnTo>
+                    <a:pt x="2864901" y="2716120"/>
+                  </a:lnTo>
+                  <a:lnTo>
+                    <a:pt x="2793278" y="2747437"/>
+                  </a:lnTo>
+                  <a:lnTo>
+                    <a:pt x="2721655" y="2777477"/>
+                  </a:lnTo>
+                  <a:lnTo>
+                    <a:pt x="2650033" y="2806291"/>
+                  </a:lnTo>
+                  <a:lnTo>
+                    <a:pt x="2578410" y="2833929"/>
+                  </a:lnTo>
+                  <a:lnTo>
+                    <a:pt x="2506788" y="2860440"/>
+                  </a:lnTo>
+                  <a:lnTo>
+                    <a:pt x="2435165" y="2885869"/>
+                  </a:lnTo>
+                  <a:lnTo>
+                    <a:pt x="2363543" y="2910261"/>
+                  </a:lnTo>
+                  <a:lnTo>
+                    <a:pt x="2291920" y="2933658"/>
+                  </a:lnTo>
+                  <a:lnTo>
+                    <a:pt x="2220298" y="2956100"/>
+                  </a:lnTo>
+                  <a:lnTo>
+                    <a:pt x="2148675" y="2977627"/>
+                  </a:lnTo>
+                  <a:lnTo>
+                    <a:pt x="2077053" y="2998275"/>
+                  </a:lnTo>
+                  <a:lnTo>
+                    <a:pt x="2005430" y="3018081"/>
+                  </a:lnTo>
+                  <a:lnTo>
+                    <a:pt x="1933808" y="3037079"/>
+                  </a:lnTo>
+                  <a:lnTo>
+                    <a:pt x="1862185" y="3055302"/>
+                  </a:lnTo>
+                  <a:lnTo>
+                    <a:pt x="1790563" y="3072781"/>
+                  </a:lnTo>
+                  <a:lnTo>
+                    <a:pt x="1718940" y="3089548"/>
+                  </a:lnTo>
+                  <a:lnTo>
+                    <a:pt x="1647318" y="3105630"/>
+                  </a:lnTo>
+                  <a:lnTo>
+                    <a:pt x="1575695" y="3121056"/>
+                  </a:lnTo>
+                  <a:lnTo>
+                    <a:pt x="1504073" y="3135853"/>
+                  </a:lnTo>
+                  <a:lnTo>
+                    <a:pt x="1432450" y="3150046"/>
+                  </a:lnTo>
+                  <a:lnTo>
+                    <a:pt x="1360827" y="3163660"/>
+                  </a:lnTo>
+                  <a:lnTo>
+                    <a:pt x="1289205" y="3176719"/>
+                  </a:lnTo>
+                  <a:lnTo>
+                    <a:pt x="1217582" y="3189245"/>
+                  </a:lnTo>
+                  <a:lnTo>
+                    <a:pt x="1145960" y="3201260"/>
+                  </a:lnTo>
+                  <a:lnTo>
+                    <a:pt x="1074337" y="3212784"/>
+                  </a:lnTo>
+                  <a:lnTo>
+                    <a:pt x="1002715" y="3223839"/>
+                  </a:lnTo>
+                  <a:lnTo>
+                    <a:pt x="931092" y="3234443"/>
+                  </a:lnTo>
+                  <a:lnTo>
+                    <a:pt x="859470" y="3244613"/>
+                  </a:lnTo>
+                  <a:lnTo>
+                    <a:pt x="787847" y="3254369"/>
+                  </a:lnTo>
+                  <a:lnTo>
+                    <a:pt x="716225" y="3263727"/>
+                  </a:lnTo>
+                  <a:lnTo>
+                    <a:pt x="644602" y="3272704"/>
+                  </a:lnTo>
+                  <a:lnTo>
+                    <a:pt x="572980" y="3281314"/>
+                  </a:lnTo>
+                  <a:lnTo>
+                    <a:pt x="501357" y="3289572"/>
+                  </a:lnTo>
+                  <a:lnTo>
+                    <a:pt x="429735" y="3297494"/>
+                  </a:lnTo>
+                  <a:lnTo>
+                    <a:pt x="358112" y="3305093"/>
+                  </a:lnTo>
+                  <a:lnTo>
+                    <a:pt x="286490" y="3312381"/>
+                  </a:lnTo>
+                  <a:lnTo>
+                    <a:pt x="214867" y="3319373"/>
+                  </a:lnTo>
+                  <a:lnTo>
+                    <a:pt x="143245" y="3326079"/>
+                  </a:lnTo>
+                  <a:lnTo>
+                    <a:pt x="71622" y="3332511"/>
+                  </a:lnTo>
+                  <a:lnTo>
+                    <a:pt x="0" y="3338681"/>
                   </a:lnTo>
                   <a:lnTo>
                     <a:pt x="0" y="0"/>
@@ -3855,141 +3852,138 @@
           </p:nvSpPr>
           <p:spPr>
             <a:xfrm>
-              <a:off x="3749967" y="2073503"/>
-              <a:ext cx="2882949" cy="2646874"/>
+              <a:off x="3755858" y="2073503"/>
+              <a:ext cx="2881628" cy="2649433"/>
             </a:xfrm>
             <a:custGeom>
               <a:avLst/>
               <a:pathLst>
-                <a:path w="2882949" h="2646874">
+                <a:path w="2881628" h="2649433">
                   <a:moveTo>
                     <a:pt x="0" y="0"/>
                   </a:moveTo>
                   <a:lnTo>
-                    <a:pt x="493" y="6726"/>
-                  </a:lnTo>
-                  <a:lnTo>
-                    <a:pt x="72115" y="769532"/>
-                  </a:lnTo>
-                  <a:lnTo>
-                    <a:pt x="143738" y="1364991"/>
-                  </a:lnTo>
-                  <a:lnTo>
-                    <a:pt x="215360" y="1829814"/>
-                  </a:lnTo>
-                  <a:lnTo>
-                    <a:pt x="286983" y="2192662"/>
-                  </a:lnTo>
-                  <a:lnTo>
-                    <a:pt x="358605" y="2475907"/>
-                  </a:lnTo>
-                  <a:lnTo>
-                    <a:pt x="430228" y="2646874"/>
-                  </a:lnTo>
-                  <a:lnTo>
-                    <a:pt x="501850" y="2611289"/>
-                  </a:lnTo>
-                  <a:lnTo>
-                    <a:pt x="573473" y="2574192"/>
-                  </a:lnTo>
-                  <a:lnTo>
-                    <a:pt x="645095" y="2535516"/>
-                  </a:lnTo>
-                  <a:lnTo>
-                    <a:pt x="716718" y="2495197"/>
-                  </a:lnTo>
-                  <a:lnTo>
-                    <a:pt x="788340" y="2453163"/>
-                  </a:lnTo>
-                  <a:lnTo>
-                    <a:pt x="859963" y="2409341"/>
-                  </a:lnTo>
-                  <a:lnTo>
-                    <a:pt x="931585" y="2363656"/>
-                  </a:lnTo>
-                  <a:lnTo>
-                    <a:pt x="1003208" y="2316029"/>
-                  </a:lnTo>
-                  <a:lnTo>
-                    <a:pt x="1074830" y="2266376"/>
-                  </a:lnTo>
-                  <a:lnTo>
-                    <a:pt x="1146453" y="2214612"/>
-                  </a:lnTo>
-                  <a:lnTo>
-                    <a:pt x="1218075" y="2160647"/>
-                  </a:lnTo>
-                  <a:lnTo>
-                    <a:pt x="1289698" y="2104388"/>
-                  </a:lnTo>
-                  <a:lnTo>
-                    <a:pt x="1361320" y="2045736"/>
-                  </a:lnTo>
-                  <a:lnTo>
-                    <a:pt x="1432943" y="1984590"/>
-                  </a:lnTo>
-                  <a:lnTo>
-                    <a:pt x="1504566" y="1920844"/>
-                  </a:lnTo>
-                  <a:lnTo>
-                    <a:pt x="1576188" y="1854388"/>
-                  </a:lnTo>
-                  <a:lnTo>
-                    <a:pt x="1647811" y="1785106"/>
-                  </a:lnTo>
-                  <a:lnTo>
-                    <a:pt x="1719433" y="1712878"/>
-                  </a:lnTo>
-                  <a:lnTo>
-                    <a:pt x="1791056" y="1637579"/>
-                  </a:lnTo>
-                  <a:lnTo>
-                    <a:pt x="1862678" y="1559078"/>
-                  </a:lnTo>
-                  <a:lnTo>
-                    <a:pt x="1934301" y="1477239"/>
-                  </a:lnTo>
-                  <a:lnTo>
-                    <a:pt x="2005923" y="1391920"/>
-                  </a:lnTo>
-                  <a:lnTo>
-                    <a:pt x="2077546" y="1302973"/>
-                  </a:lnTo>
-                  <a:lnTo>
-                    <a:pt x="2149168" y="1210245"/>
-                  </a:lnTo>
-                  <a:lnTo>
-                    <a:pt x="2220791" y="1113573"/>
-                  </a:lnTo>
-                  <a:lnTo>
-                    <a:pt x="2292413" y="1012791"/>
-                  </a:lnTo>
-                  <a:lnTo>
-                    <a:pt x="2364036" y="907723"/>
-                  </a:lnTo>
-                  <a:lnTo>
-                    <a:pt x="2435658" y="798188"/>
-                  </a:lnTo>
-                  <a:lnTo>
-                    <a:pt x="2507281" y="683995"/>
-                  </a:lnTo>
-                  <a:lnTo>
-                    <a:pt x="2578903" y="564947"/>
-                  </a:lnTo>
-                  <a:lnTo>
-                    <a:pt x="2650526" y="440836"/>
-                  </a:lnTo>
-                  <a:lnTo>
-                    <a:pt x="2722148" y="311448"/>
-                  </a:lnTo>
-                  <a:lnTo>
-                    <a:pt x="2793771" y="176559"/>
-                  </a:lnTo>
-                  <a:lnTo>
-                    <a:pt x="2865394" y="35934"/>
-                  </a:lnTo>
-                  <a:lnTo>
-                    <a:pt x="2882949" y="0"/>
+                    <a:pt x="66224" y="718728"/>
+                  </a:lnTo>
+                  <a:lnTo>
+                    <a:pt x="137846" y="1325474"/>
+                  </a:lnTo>
+                  <a:lnTo>
+                    <a:pt x="209469" y="1799078"/>
+                  </a:lnTo>
+                  <a:lnTo>
+                    <a:pt x="281091" y="2168756"/>
+                  </a:lnTo>
+                  <a:lnTo>
+                    <a:pt x="352714" y="2457313"/>
+                  </a:lnTo>
+                  <a:lnTo>
+                    <a:pt x="424336" y="2649433"/>
+                  </a:lnTo>
+                  <a:lnTo>
+                    <a:pt x="495959" y="2613948"/>
+                  </a:lnTo>
+                  <a:lnTo>
+                    <a:pt x="567581" y="2576953"/>
+                  </a:lnTo>
+                  <a:lnTo>
+                    <a:pt x="639204" y="2538385"/>
+                  </a:lnTo>
+                  <a:lnTo>
+                    <a:pt x="710826" y="2498176"/>
+                  </a:lnTo>
+                  <a:lnTo>
+                    <a:pt x="782449" y="2456257"/>
+                  </a:lnTo>
+                  <a:lnTo>
+                    <a:pt x="854071" y="2412555"/>
+                  </a:lnTo>
+                  <a:lnTo>
+                    <a:pt x="925694" y="2366995"/>
+                  </a:lnTo>
+                  <a:lnTo>
+                    <a:pt x="997316" y="2319496"/>
+                  </a:lnTo>
+                  <a:lnTo>
+                    <a:pt x="1068939" y="2269978"/>
+                  </a:lnTo>
+                  <a:lnTo>
+                    <a:pt x="1140561" y="2218353"/>
+                  </a:lnTo>
+                  <a:lnTo>
+                    <a:pt x="1212184" y="2164532"/>
+                  </a:lnTo>
+                  <a:lnTo>
+                    <a:pt x="1283807" y="2108423"/>
+                  </a:lnTo>
+                  <a:lnTo>
+                    <a:pt x="1355429" y="2049926"/>
+                  </a:lnTo>
+                  <a:lnTo>
+                    <a:pt x="1427052" y="1988942"/>
+                  </a:lnTo>
+                  <a:lnTo>
+                    <a:pt x="1498674" y="1925364"/>
+                  </a:lnTo>
+                  <a:lnTo>
+                    <a:pt x="1570297" y="1859082"/>
+                  </a:lnTo>
+                  <a:lnTo>
+                    <a:pt x="1641919" y="1789981"/>
+                  </a:lnTo>
+                  <a:lnTo>
+                    <a:pt x="1713542" y="1717941"/>
+                  </a:lnTo>
+                  <a:lnTo>
+                    <a:pt x="1785164" y="1642836"/>
+                  </a:lnTo>
+                  <a:lnTo>
+                    <a:pt x="1856787" y="1564538"/>
+                  </a:lnTo>
+                  <a:lnTo>
+                    <a:pt x="1928409" y="1482909"/>
+                  </a:lnTo>
+                  <a:lnTo>
+                    <a:pt x="2000032" y="1397808"/>
+                  </a:lnTo>
+                  <a:lnTo>
+                    <a:pt x="2071654" y="1309087"/>
+                  </a:lnTo>
+                  <a:lnTo>
+                    <a:pt x="2143277" y="1216593"/>
+                  </a:lnTo>
+                  <a:lnTo>
+                    <a:pt x="2214899" y="1120165"/>
+                  </a:lnTo>
+                  <a:lnTo>
+                    <a:pt x="2286522" y="1019636"/>
+                  </a:lnTo>
+                  <a:lnTo>
+                    <a:pt x="2358144" y="914831"/>
+                  </a:lnTo>
+                  <a:lnTo>
+                    <a:pt x="2429767" y="805568"/>
+                  </a:lnTo>
+                  <a:lnTo>
+                    <a:pt x="2501389" y="691658"/>
+                  </a:lnTo>
+                  <a:lnTo>
+                    <a:pt x="2573012" y="572903"/>
+                  </a:lnTo>
+                  <a:lnTo>
+                    <a:pt x="2644635" y="449098"/>
+                  </a:lnTo>
+                  <a:lnTo>
+                    <a:pt x="2716257" y="320026"/>
+                  </a:lnTo>
+                  <a:lnTo>
+                    <a:pt x="2787880" y="185465"/>
+                  </a:lnTo>
+                  <a:lnTo>
+                    <a:pt x="2859502" y="45180"/>
+                  </a:lnTo>
+                  <a:lnTo>
+                    <a:pt x="2881628" y="0"/>
                   </a:lnTo>
                 </a:path>
               </a:pathLst>
@@ -4009,312 +4003,312 @@
           </p:nvSpPr>
           <p:spPr>
             <a:xfrm>
-              <a:off x="1172049" y="4754511"/>
-              <a:ext cx="7090630" cy="802738"/>
+              <a:off x="1172049" y="4756053"/>
+              <a:ext cx="7090630" cy="801196"/>
             </a:xfrm>
             <a:custGeom>
               <a:avLst/>
               <a:pathLst>
-                <a:path w="7090630" h="802738">
+                <a:path w="7090630" h="801196">
                   <a:moveTo>
-                    <a:pt x="7090630" y="802738"/>
+                    <a:pt x="7090630" y="801196"/>
                   </a:moveTo>
                   <a:lnTo>
-                    <a:pt x="7019007" y="802738"/>
-                  </a:lnTo>
-                  <a:lnTo>
-                    <a:pt x="6947385" y="802737"/>
-                  </a:lnTo>
-                  <a:lnTo>
-                    <a:pt x="6875762" y="802737"/>
-                  </a:lnTo>
-                  <a:lnTo>
-                    <a:pt x="6804139" y="802737"/>
-                  </a:lnTo>
-                  <a:lnTo>
-                    <a:pt x="6732517" y="802736"/>
-                  </a:lnTo>
-                  <a:lnTo>
-                    <a:pt x="6660894" y="802736"/>
-                  </a:lnTo>
-                  <a:lnTo>
-                    <a:pt x="6589272" y="802735"/>
-                  </a:lnTo>
-                  <a:lnTo>
-                    <a:pt x="6517649" y="802734"/>
-                  </a:lnTo>
-                  <a:lnTo>
-                    <a:pt x="6446027" y="802733"/>
-                  </a:lnTo>
-                  <a:lnTo>
-                    <a:pt x="6374404" y="802731"/>
-                  </a:lnTo>
-                  <a:lnTo>
-                    <a:pt x="6302782" y="802730"/>
-                  </a:lnTo>
-                  <a:lnTo>
-                    <a:pt x="6231159" y="802727"/>
-                  </a:lnTo>
-                  <a:lnTo>
-                    <a:pt x="6159537" y="802724"/>
-                  </a:lnTo>
-                  <a:lnTo>
-                    <a:pt x="6087914" y="802720"/>
-                  </a:lnTo>
-                  <a:lnTo>
-                    <a:pt x="6016292" y="802715"/>
-                  </a:lnTo>
-                  <a:lnTo>
-                    <a:pt x="5944669" y="802708"/>
-                  </a:lnTo>
-                  <a:lnTo>
-                    <a:pt x="5873047" y="802699"/>
-                  </a:lnTo>
-                  <a:lnTo>
-                    <a:pt x="5801424" y="802688"/>
-                  </a:lnTo>
-                  <a:lnTo>
-                    <a:pt x="5729802" y="802674"/>
-                  </a:lnTo>
-                  <a:lnTo>
-                    <a:pt x="5658179" y="802656"/>
-                  </a:lnTo>
-                  <a:lnTo>
-                    <a:pt x="5586557" y="802633"/>
-                  </a:lnTo>
-                  <a:lnTo>
-                    <a:pt x="5514934" y="802603"/>
-                  </a:lnTo>
-                  <a:lnTo>
-                    <a:pt x="5443311" y="802565"/>
-                  </a:lnTo>
-                  <a:lnTo>
-                    <a:pt x="5371689" y="802516"/>
-                  </a:lnTo>
-                  <a:lnTo>
-                    <a:pt x="5300066" y="802454"/>
-                  </a:lnTo>
-                  <a:lnTo>
-                    <a:pt x="5228444" y="802374"/>
-                  </a:lnTo>
-                  <a:lnTo>
-                    <a:pt x="5156821" y="802272"/>
-                  </a:lnTo>
-                  <a:lnTo>
-                    <a:pt x="5085199" y="802141"/>
-                  </a:lnTo>
-                  <a:lnTo>
-                    <a:pt x="5013576" y="801973"/>
-                  </a:lnTo>
-                  <a:lnTo>
-                    <a:pt x="4941954" y="801758"/>
-                  </a:lnTo>
-                  <a:lnTo>
-                    <a:pt x="4870331" y="801482"/>
-                  </a:lnTo>
-                  <a:lnTo>
-                    <a:pt x="4798709" y="801129"/>
-                  </a:lnTo>
-                  <a:lnTo>
-                    <a:pt x="4727086" y="800676"/>
-                  </a:lnTo>
-                  <a:lnTo>
-                    <a:pt x="4655464" y="800097"/>
-                  </a:lnTo>
-                  <a:lnTo>
-                    <a:pt x="4583841" y="799354"/>
-                  </a:lnTo>
-                  <a:lnTo>
-                    <a:pt x="4512219" y="798403"/>
-                  </a:lnTo>
-                  <a:lnTo>
-                    <a:pt x="4440596" y="797185"/>
-                  </a:lnTo>
-                  <a:lnTo>
-                    <a:pt x="4368974" y="795624"/>
-                  </a:lnTo>
-                  <a:lnTo>
-                    <a:pt x="4297351" y="793625"/>
-                  </a:lnTo>
-                  <a:lnTo>
-                    <a:pt x="4225729" y="791063"/>
-                  </a:lnTo>
-                  <a:lnTo>
-                    <a:pt x="4154106" y="787782"/>
-                  </a:lnTo>
-                  <a:lnTo>
-                    <a:pt x="4082483" y="783579"/>
-                  </a:lnTo>
-                  <a:lnTo>
-                    <a:pt x="4010861" y="778195"/>
-                  </a:lnTo>
-                  <a:lnTo>
-                    <a:pt x="3939238" y="771297"/>
-                  </a:lnTo>
-                  <a:lnTo>
-                    <a:pt x="3867616" y="762460"/>
-                  </a:lnTo>
-                  <a:lnTo>
-                    <a:pt x="3795993" y="751140"/>
-                  </a:lnTo>
-                  <a:lnTo>
-                    <a:pt x="3724371" y="736639"/>
-                  </a:lnTo>
-                  <a:lnTo>
-                    <a:pt x="3652748" y="718063"/>
-                  </a:lnTo>
-                  <a:lnTo>
-                    <a:pt x="3581126" y="694265"/>
-                  </a:lnTo>
-                  <a:lnTo>
-                    <a:pt x="3509503" y="663780"/>
-                  </a:lnTo>
-                  <a:lnTo>
-                    <a:pt x="3437881" y="624726"/>
-                  </a:lnTo>
-                  <a:lnTo>
-                    <a:pt x="3366258" y="574698"/>
-                  </a:lnTo>
-                  <a:lnTo>
-                    <a:pt x="3294636" y="510609"/>
-                  </a:lnTo>
-                  <a:lnTo>
-                    <a:pt x="3223013" y="428508"/>
-                  </a:lnTo>
-                  <a:lnTo>
-                    <a:pt x="3151391" y="323334"/>
-                  </a:lnTo>
-                  <a:lnTo>
-                    <a:pt x="3079768" y="188602"/>
-                  </a:lnTo>
-                  <a:lnTo>
-                    <a:pt x="3008146" y="16004"/>
-                  </a:lnTo>
-                  <a:lnTo>
-                    <a:pt x="2936523" y="0"/>
-                  </a:lnTo>
-                  <a:lnTo>
-                    <a:pt x="2864901" y="32741"/>
-                  </a:lnTo>
-                  <a:lnTo>
-                    <a:pt x="2793278" y="64146"/>
-                  </a:lnTo>
-                  <a:lnTo>
-                    <a:pt x="2721655" y="94271"/>
-                  </a:lnTo>
-                  <a:lnTo>
-                    <a:pt x="2650033" y="123167"/>
-                  </a:lnTo>
-                  <a:lnTo>
-                    <a:pt x="2578410" y="150885"/>
-                  </a:lnTo>
-                  <a:lnTo>
-                    <a:pt x="2506788" y="177472"/>
-                  </a:lnTo>
-                  <a:lnTo>
-                    <a:pt x="2435165" y="202974"/>
-                  </a:lnTo>
-                  <a:lnTo>
-                    <a:pt x="2363543" y="227437"/>
-                  </a:lnTo>
-                  <a:lnTo>
-                    <a:pt x="2291920" y="250901"/>
-                  </a:lnTo>
-                  <a:lnTo>
-                    <a:pt x="2220298" y="273409"/>
-                  </a:lnTo>
-                  <a:lnTo>
-                    <a:pt x="2148675" y="294999"/>
-                  </a:lnTo>
-                  <a:lnTo>
-                    <a:pt x="2077053" y="315708"/>
-                  </a:lnTo>
-                  <a:lnTo>
-                    <a:pt x="2005430" y="335572"/>
-                  </a:lnTo>
-                  <a:lnTo>
-                    <a:pt x="1933808" y="354626"/>
-                  </a:lnTo>
-                  <a:lnTo>
-                    <a:pt x="1862185" y="372903"/>
-                  </a:lnTo>
-                  <a:lnTo>
-                    <a:pt x="1790563" y="390435"/>
-                  </a:lnTo>
-                  <a:lnTo>
-                    <a:pt x="1718940" y="407252"/>
-                  </a:lnTo>
-                  <a:lnTo>
-                    <a:pt x="1647318" y="423382"/>
-                  </a:lnTo>
-                  <a:lnTo>
-                    <a:pt x="1575695" y="438855"/>
-                  </a:lnTo>
-                  <a:lnTo>
-                    <a:pt x="1504073" y="453697"/>
-                  </a:lnTo>
-                  <a:lnTo>
-                    <a:pt x="1432450" y="467933"/>
-                  </a:lnTo>
-                  <a:lnTo>
-                    <a:pt x="1360827" y="481588"/>
-                  </a:lnTo>
-                  <a:lnTo>
-                    <a:pt x="1289205" y="494687"/>
-                  </a:lnTo>
-                  <a:lnTo>
-                    <a:pt x="1217582" y="507252"/>
-                  </a:lnTo>
-                  <a:lnTo>
-                    <a:pt x="1145960" y="519303"/>
-                  </a:lnTo>
-                  <a:lnTo>
-                    <a:pt x="1074337" y="530864"/>
-                  </a:lnTo>
-                  <a:lnTo>
-                    <a:pt x="1002715" y="541953"/>
-                  </a:lnTo>
-                  <a:lnTo>
-                    <a:pt x="931092" y="552589"/>
-                  </a:lnTo>
-                  <a:lnTo>
-                    <a:pt x="859470" y="562792"/>
-                  </a:lnTo>
-                  <a:lnTo>
-                    <a:pt x="787847" y="572579"/>
-                  </a:lnTo>
-                  <a:lnTo>
-                    <a:pt x="716225" y="581966"/>
-                  </a:lnTo>
-                  <a:lnTo>
-                    <a:pt x="644602" y="590971"/>
-                  </a:lnTo>
-                  <a:lnTo>
-                    <a:pt x="572980" y="599608"/>
-                  </a:lnTo>
-                  <a:lnTo>
-                    <a:pt x="501357" y="607893"/>
-                  </a:lnTo>
-                  <a:lnTo>
-                    <a:pt x="429735" y="615840"/>
-                  </a:lnTo>
-                  <a:lnTo>
-                    <a:pt x="358112" y="623463"/>
-                  </a:lnTo>
-                  <a:lnTo>
-                    <a:pt x="286490" y="630775"/>
-                  </a:lnTo>
-                  <a:lnTo>
-                    <a:pt x="214867" y="637789"/>
-                  </a:lnTo>
-                  <a:lnTo>
-                    <a:pt x="143245" y="644517"/>
-                  </a:lnTo>
-                  <a:lnTo>
-                    <a:pt x="71622" y="650970"/>
-                  </a:lnTo>
-                  <a:lnTo>
-                    <a:pt x="0" y="657160"/>
+                    <a:pt x="7019007" y="801195"/>
+                  </a:lnTo>
+                  <a:lnTo>
+                    <a:pt x="6947385" y="801195"/>
+                  </a:lnTo>
+                  <a:lnTo>
+                    <a:pt x="6875762" y="801195"/>
+                  </a:lnTo>
+                  <a:lnTo>
+                    <a:pt x="6804139" y="801195"/>
+                  </a:lnTo>
+                  <a:lnTo>
+                    <a:pt x="6732517" y="801194"/>
+                  </a:lnTo>
+                  <a:lnTo>
+                    <a:pt x="6660894" y="801194"/>
+                  </a:lnTo>
+                  <a:lnTo>
+                    <a:pt x="6589272" y="801193"/>
+                  </a:lnTo>
+                  <a:lnTo>
+                    <a:pt x="6517649" y="801192"/>
+                  </a:lnTo>
+                  <a:lnTo>
+                    <a:pt x="6446027" y="801191"/>
+                  </a:lnTo>
+                  <a:lnTo>
+                    <a:pt x="6374404" y="801189"/>
+                  </a:lnTo>
+                  <a:lnTo>
+                    <a:pt x="6302782" y="801187"/>
+                  </a:lnTo>
+                  <a:lnTo>
+                    <a:pt x="6231159" y="801185"/>
+                  </a:lnTo>
+                  <a:lnTo>
+                    <a:pt x="6159537" y="801181"/>
+                  </a:lnTo>
+                  <a:lnTo>
+                    <a:pt x="6087914" y="801177"/>
+                  </a:lnTo>
+                  <a:lnTo>
+                    <a:pt x="6016292" y="801172"/>
+                  </a:lnTo>
+                  <a:lnTo>
+                    <a:pt x="5944669" y="801165"/>
+                  </a:lnTo>
+                  <a:lnTo>
+                    <a:pt x="5873047" y="801156"/>
+                  </a:lnTo>
+                  <a:lnTo>
+                    <a:pt x="5801424" y="801145"/>
+                  </a:lnTo>
+                  <a:lnTo>
+                    <a:pt x="5729802" y="801131"/>
+                  </a:lnTo>
+                  <a:lnTo>
+                    <a:pt x="5658179" y="801112"/>
+                  </a:lnTo>
+                  <a:lnTo>
+                    <a:pt x="5586557" y="801089"/>
+                  </a:lnTo>
+                  <a:lnTo>
+                    <a:pt x="5514934" y="801059"/>
+                  </a:lnTo>
+                  <a:lnTo>
+                    <a:pt x="5443311" y="801020"/>
+                  </a:lnTo>
+                  <a:lnTo>
+                    <a:pt x="5371689" y="800971"/>
+                  </a:lnTo>
+                  <a:lnTo>
+                    <a:pt x="5300066" y="800907"/>
+                  </a:lnTo>
+                  <a:lnTo>
+                    <a:pt x="5228444" y="800826"/>
+                  </a:lnTo>
+                  <a:lnTo>
+                    <a:pt x="5156821" y="800722"/>
+                  </a:lnTo>
+                  <a:lnTo>
+                    <a:pt x="5085199" y="800589"/>
+                  </a:lnTo>
+                  <a:lnTo>
+                    <a:pt x="5013576" y="800418"/>
+                  </a:lnTo>
+                  <a:lnTo>
+                    <a:pt x="4941954" y="800199"/>
+                  </a:lnTo>
+                  <a:lnTo>
+                    <a:pt x="4870331" y="799919"/>
+                  </a:lnTo>
+                  <a:lnTo>
+                    <a:pt x="4798709" y="799560"/>
+                  </a:lnTo>
+                  <a:lnTo>
+                    <a:pt x="4727086" y="799099"/>
+                  </a:lnTo>
+                  <a:lnTo>
+                    <a:pt x="4655464" y="798510"/>
+                  </a:lnTo>
+                  <a:lnTo>
+                    <a:pt x="4583841" y="797755"/>
+                  </a:lnTo>
+                  <a:lnTo>
+                    <a:pt x="4512219" y="796787"/>
+                  </a:lnTo>
+                  <a:lnTo>
+                    <a:pt x="4440596" y="795548"/>
+                  </a:lnTo>
+                  <a:lnTo>
+                    <a:pt x="4368974" y="793960"/>
+                  </a:lnTo>
+                  <a:lnTo>
+                    <a:pt x="4297351" y="791926"/>
+                  </a:lnTo>
+                  <a:lnTo>
+                    <a:pt x="4225729" y="789320"/>
+                  </a:lnTo>
+                  <a:lnTo>
+                    <a:pt x="4154106" y="785981"/>
+                  </a:lnTo>
+                  <a:lnTo>
+                    <a:pt x="4082483" y="781704"/>
+                  </a:lnTo>
+                  <a:lnTo>
+                    <a:pt x="4010861" y="776224"/>
+                  </a:lnTo>
+                  <a:lnTo>
+                    <a:pt x="3939238" y="769204"/>
+                  </a:lnTo>
+                  <a:lnTo>
+                    <a:pt x="3867616" y="760210"/>
+                  </a:lnTo>
+                  <a:lnTo>
+                    <a:pt x="3795993" y="748688"/>
+                  </a:lnTo>
+                  <a:lnTo>
+                    <a:pt x="3724371" y="733926"/>
+                  </a:lnTo>
+                  <a:lnTo>
+                    <a:pt x="3652748" y="715015"/>
+                  </a:lnTo>
+                  <a:lnTo>
+                    <a:pt x="3581126" y="690787"/>
+                  </a:lnTo>
+                  <a:lnTo>
+                    <a:pt x="3509503" y="659748"/>
+                  </a:lnTo>
+                  <a:lnTo>
+                    <a:pt x="3437881" y="619984"/>
+                  </a:lnTo>
+                  <a:lnTo>
+                    <a:pt x="3366258" y="569040"/>
+                  </a:lnTo>
+                  <a:lnTo>
+                    <a:pt x="3294636" y="503775"/>
+                  </a:lnTo>
+                  <a:lnTo>
+                    <a:pt x="3223013" y="420162"/>
+                  </a:lnTo>
+                  <a:lnTo>
+                    <a:pt x="3151391" y="313044"/>
+                  </a:lnTo>
+                  <a:lnTo>
+                    <a:pt x="3079768" y="175811"/>
+                  </a:lnTo>
+                  <a:lnTo>
+                    <a:pt x="3008146" y="0"/>
+                  </a:lnTo>
+                  <a:lnTo>
+                    <a:pt x="2936523" y="921"/>
+                  </a:lnTo>
+                  <a:lnTo>
+                    <a:pt x="2864901" y="33570"/>
+                  </a:lnTo>
+                  <a:lnTo>
+                    <a:pt x="2793278" y="64887"/>
+                  </a:lnTo>
+                  <a:lnTo>
+                    <a:pt x="2721655" y="94927"/>
+                  </a:lnTo>
+                  <a:lnTo>
+                    <a:pt x="2650033" y="123741"/>
+                  </a:lnTo>
+                  <a:lnTo>
+                    <a:pt x="2578410" y="151379"/>
+                  </a:lnTo>
+                  <a:lnTo>
+                    <a:pt x="2506788" y="177890"/>
+                  </a:lnTo>
+                  <a:lnTo>
+                    <a:pt x="2435165" y="203319"/>
+                  </a:lnTo>
+                  <a:lnTo>
+                    <a:pt x="2363543" y="227711"/>
+                  </a:lnTo>
+                  <a:lnTo>
+                    <a:pt x="2291920" y="251108"/>
+                  </a:lnTo>
+                  <a:lnTo>
+                    <a:pt x="2220298" y="273550"/>
+                  </a:lnTo>
+                  <a:lnTo>
+                    <a:pt x="2148675" y="295077"/>
+                  </a:lnTo>
+                  <a:lnTo>
+                    <a:pt x="2077053" y="315725"/>
+                  </a:lnTo>
+                  <a:lnTo>
+                    <a:pt x="2005430" y="335531"/>
+                  </a:lnTo>
+                  <a:lnTo>
+                    <a:pt x="1933808" y="354529"/>
+                  </a:lnTo>
+                  <a:lnTo>
+                    <a:pt x="1862185" y="372752"/>
+                  </a:lnTo>
+                  <a:lnTo>
+                    <a:pt x="1790563" y="390231"/>
+                  </a:lnTo>
+                  <a:lnTo>
+                    <a:pt x="1718940" y="406997"/>
+                  </a:lnTo>
+                  <a:lnTo>
+                    <a:pt x="1647318" y="423080"/>
+                  </a:lnTo>
+                  <a:lnTo>
+                    <a:pt x="1575695" y="438506"/>
+                  </a:lnTo>
+                  <a:lnTo>
+                    <a:pt x="1504073" y="453303"/>
+                  </a:lnTo>
+                  <a:lnTo>
+                    <a:pt x="1432450" y="467496"/>
+                  </a:lnTo>
+                  <a:lnTo>
+                    <a:pt x="1360827" y="481110"/>
+                  </a:lnTo>
+                  <a:lnTo>
+                    <a:pt x="1289205" y="494169"/>
+                  </a:lnTo>
+                  <a:lnTo>
+                    <a:pt x="1217582" y="506695"/>
+                  </a:lnTo>
+                  <a:lnTo>
+                    <a:pt x="1145960" y="518709"/>
+                  </a:lnTo>
+                  <a:lnTo>
+                    <a:pt x="1074337" y="530234"/>
+                  </a:lnTo>
+                  <a:lnTo>
+                    <a:pt x="1002715" y="541289"/>
+                  </a:lnTo>
+                  <a:lnTo>
+                    <a:pt x="931092" y="551892"/>
+                  </a:lnTo>
+                  <a:lnTo>
+                    <a:pt x="859470" y="562063"/>
+                  </a:lnTo>
+                  <a:lnTo>
+                    <a:pt x="787847" y="571819"/>
+                  </a:lnTo>
+                  <a:lnTo>
+                    <a:pt x="716225" y="581177"/>
+                  </a:lnTo>
+                  <a:lnTo>
+                    <a:pt x="644602" y="590153"/>
+                  </a:lnTo>
+                  <a:lnTo>
+                    <a:pt x="572980" y="598763"/>
+                  </a:lnTo>
+                  <a:lnTo>
+                    <a:pt x="501357" y="607022"/>
+                  </a:lnTo>
+                  <a:lnTo>
+                    <a:pt x="429735" y="614944"/>
+                  </a:lnTo>
+                  <a:lnTo>
+                    <a:pt x="358112" y="622543"/>
+                  </a:lnTo>
+                  <a:lnTo>
+                    <a:pt x="286490" y="629831"/>
+                  </a:lnTo>
+                  <a:lnTo>
+                    <a:pt x="214867" y="636822"/>
+                  </a:lnTo>
+                  <a:lnTo>
+                    <a:pt x="143245" y="643528"/>
+                  </a:lnTo>
+                  <a:lnTo>
+                    <a:pt x="71622" y="649961"/>
+                  </a:lnTo>
+                  <a:lnTo>
+                    <a:pt x="0" y="656131"/>
                   </a:lnTo>
                 </a:path>
               </a:pathLst>
@@ -4334,231 +4328,231 @@
           </p:nvSpPr>
           <p:spPr>
             <a:xfrm>
-              <a:off x="3167596" y="2073503"/>
-              <a:ext cx="5095082" cy="3481460"/>
+              <a:off x="3172909" y="2073503"/>
+              <a:ext cx="5089769" cy="3481446"/>
             </a:xfrm>
             <a:custGeom>
               <a:avLst/>
               <a:pathLst>
-                <a:path w="5095082" h="3481460">
+                <a:path w="5089769" h="3481446">
                   <a:moveTo>
                     <a:pt x="0" y="0"/>
                   </a:moveTo>
                   <a:lnTo>
-                    <a:pt x="9883" y="51393"/>
-                  </a:lnTo>
-                  <a:lnTo>
-                    <a:pt x="81505" y="387376"/>
-                  </a:lnTo>
-                  <a:lnTo>
-                    <a:pt x="153128" y="690471"/>
-                  </a:lnTo>
-                  <a:lnTo>
-                    <a:pt x="224750" y="963897"/>
-                  </a:lnTo>
-                  <a:lnTo>
-                    <a:pt x="296373" y="1210558"/>
-                  </a:lnTo>
-                  <a:lnTo>
-                    <a:pt x="367995" y="1433074"/>
-                  </a:lnTo>
-                  <a:lnTo>
-                    <a:pt x="439618" y="1633809"/>
-                  </a:lnTo>
-                  <a:lnTo>
-                    <a:pt x="511240" y="1814894"/>
-                  </a:lnTo>
-                  <a:lnTo>
-                    <a:pt x="582863" y="1978254"/>
-                  </a:lnTo>
-                  <a:lnTo>
-                    <a:pt x="654485" y="2125622"/>
-                  </a:lnTo>
-                  <a:lnTo>
-                    <a:pt x="726108" y="2258565"/>
-                  </a:lnTo>
-                  <a:lnTo>
-                    <a:pt x="797730" y="2378495"/>
-                  </a:lnTo>
-                  <a:lnTo>
-                    <a:pt x="869353" y="2486685"/>
-                  </a:lnTo>
-                  <a:lnTo>
-                    <a:pt x="940976" y="2584284"/>
-                  </a:lnTo>
-                  <a:lnTo>
-                    <a:pt x="1012598" y="2672330"/>
-                  </a:lnTo>
-                  <a:lnTo>
-                    <a:pt x="1084221" y="2751757"/>
-                  </a:lnTo>
-                  <a:lnTo>
-                    <a:pt x="1155843" y="2823410"/>
-                  </a:lnTo>
-                  <a:lnTo>
-                    <a:pt x="1227466" y="2888048"/>
-                  </a:lnTo>
-                  <a:lnTo>
-                    <a:pt x="1299088" y="2946360"/>
-                  </a:lnTo>
-                  <a:lnTo>
-                    <a:pt x="1370711" y="2998963"/>
-                  </a:lnTo>
-                  <a:lnTo>
-                    <a:pt x="1442333" y="3046417"/>
-                  </a:lnTo>
-                  <a:lnTo>
-                    <a:pt x="1513956" y="3089226"/>
-                  </a:lnTo>
-                  <a:lnTo>
-                    <a:pt x="1585578" y="3127845"/>
-                  </a:lnTo>
-                  <a:lnTo>
-                    <a:pt x="1657201" y="3162683"/>
-                  </a:lnTo>
-                  <a:lnTo>
-                    <a:pt x="1728823" y="3194111"/>
-                  </a:lnTo>
-                  <a:lnTo>
-                    <a:pt x="1800446" y="3222462"/>
-                  </a:lnTo>
-                  <a:lnTo>
-                    <a:pt x="1872068" y="3248039"/>
-                  </a:lnTo>
-                  <a:lnTo>
-                    <a:pt x="1943691" y="3271112"/>
-                  </a:lnTo>
-                  <a:lnTo>
-                    <a:pt x="2015313" y="3291926"/>
-                  </a:lnTo>
-                  <a:lnTo>
-                    <a:pt x="2086936" y="3310703"/>
-                  </a:lnTo>
-                  <a:lnTo>
-                    <a:pt x="2158558" y="3327641"/>
-                  </a:lnTo>
-                  <a:lnTo>
-                    <a:pt x="2230181" y="3342922"/>
-                  </a:lnTo>
-                  <a:lnTo>
-                    <a:pt x="2301804" y="3356707"/>
-                  </a:lnTo>
-                  <a:lnTo>
-                    <a:pt x="2373426" y="3369142"/>
-                  </a:lnTo>
-                  <a:lnTo>
-                    <a:pt x="2445049" y="3380361"/>
-                  </a:lnTo>
-                  <a:lnTo>
-                    <a:pt x="2516671" y="3390481"/>
-                  </a:lnTo>
-                  <a:lnTo>
-                    <a:pt x="2588294" y="3399610"/>
-                  </a:lnTo>
-                  <a:lnTo>
-                    <a:pt x="2659916" y="3407846"/>
-                  </a:lnTo>
-                  <a:lnTo>
-                    <a:pt x="2731539" y="3415276"/>
-                  </a:lnTo>
-                  <a:lnTo>
-                    <a:pt x="2803161" y="3421978"/>
-                  </a:lnTo>
-                  <a:lnTo>
-                    <a:pt x="2874784" y="3428025"/>
-                  </a:lnTo>
-                  <a:lnTo>
-                    <a:pt x="2946406" y="3433479"/>
-                  </a:lnTo>
-                  <a:lnTo>
-                    <a:pt x="3018029" y="3438400"/>
-                  </a:lnTo>
-                  <a:lnTo>
-                    <a:pt x="3089651" y="3442838"/>
-                  </a:lnTo>
-                  <a:lnTo>
-                    <a:pt x="3161274" y="3446843"/>
-                  </a:lnTo>
-                  <a:lnTo>
-                    <a:pt x="3232896" y="3450455"/>
-                  </a:lnTo>
-                  <a:lnTo>
-                    <a:pt x="3304519" y="3453714"/>
-                  </a:lnTo>
-                  <a:lnTo>
-                    <a:pt x="3376141" y="3456654"/>
-                  </a:lnTo>
-                  <a:lnTo>
-                    <a:pt x="3447764" y="3459306"/>
-                  </a:lnTo>
-                  <a:lnTo>
-                    <a:pt x="3519386" y="3461698"/>
-                  </a:lnTo>
-                  <a:lnTo>
-                    <a:pt x="3591009" y="3463856"/>
-                  </a:lnTo>
-                  <a:lnTo>
-                    <a:pt x="3662632" y="3465803"/>
-                  </a:lnTo>
-                  <a:lnTo>
-                    <a:pt x="3734254" y="3467560"/>
-                  </a:lnTo>
-                  <a:lnTo>
-                    <a:pt x="3805877" y="3469144"/>
-                  </a:lnTo>
-                  <a:lnTo>
-                    <a:pt x="3877499" y="3470574"/>
-                  </a:lnTo>
-                  <a:lnTo>
-                    <a:pt x="3949122" y="3471863"/>
-                  </a:lnTo>
-                  <a:lnTo>
-                    <a:pt x="4020744" y="3473026"/>
-                  </a:lnTo>
-                  <a:lnTo>
-                    <a:pt x="4092367" y="3474076"/>
-                  </a:lnTo>
-                  <a:lnTo>
-                    <a:pt x="4163989" y="3475022"/>
-                  </a:lnTo>
-                  <a:lnTo>
-                    <a:pt x="4235612" y="3475876"/>
-                  </a:lnTo>
-                  <a:lnTo>
-                    <a:pt x="4307234" y="3476647"/>
-                  </a:lnTo>
-                  <a:lnTo>
-                    <a:pt x="4378857" y="3477342"/>
-                  </a:lnTo>
-                  <a:lnTo>
-                    <a:pt x="4450479" y="3477969"/>
-                  </a:lnTo>
-                  <a:lnTo>
-                    <a:pt x="4522102" y="3478534"/>
-                  </a:lnTo>
-                  <a:lnTo>
-                    <a:pt x="4593724" y="3479044"/>
-                  </a:lnTo>
-                  <a:lnTo>
-                    <a:pt x="4665347" y="3479505"/>
-                  </a:lnTo>
-                  <a:lnTo>
-                    <a:pt x="4736969" y="3479920"/>
-                  </a:lnTo>
-                  <a:lnTo>
-                    <a:pt x="4808592" y="3480294"/>
-                  </a:lnTo>
-                  <a:lnTo>
-                    <a:pt x="4880214" y="3480632"/>
-                  </a:lnTo>
-                  <a:lnTo>
-                    <a:pt x="4951837" y="3480937"/>
-                  </a:lnTo>
-                  <a:lnTo>
-                    <a:pt x="5023460" y="3481212"/>
-                  </a:lnTo>
-                  <a:lnTo>
-                    <a:pt x="5095082" y="3481460"/>
+                    <a:pt x="4570" y="23963"/>
+                  </a:lnTo>
+                  <a:lnTo>
+                    <a:pt x="76193" y="362717"/>
+                  </a:lnTo>
+                  <a:lnTo>
+                    <a:pt x="147815" y="668303"/>
+                  </a:lnTo>
+                  <a:lnTo>
+                    <a:pt x="219438" y="943969"/>
+                  </a:lnTo>
+                  <a:lnTo>
+                    <a:pt x="291060" y="1192643"/>
+                  </a:lnTo>
+                  <a:lnTo>
+                    <a:pt x="362683" y="1416969"/>
+                  </a:lnTo>
+                  <a:lnTo>
+                    <a:pt x="434305" y="1619332"/>
+                  </a:lnTo>
+                  <a:lnTo>
+                    <a:pt x="505928" y="1801880"/>
+                  </a:lnTo>
+                  <a:lnTo>
+                    <a:pt x="577550" y="1966555"/>
+                  </a:lnTo>
+                  <a:lnTo>
+                    <a:pt x="649173" y="2115106"/>
+                  </a:lnTo>
+                  <a:lnTo>
+                    <a:pt x="720795" y="2249112"/>
+                  </a:lnTo>
+                  <a:lnTo>
+                    <a:pt x="792418" y="2369998"/>
+                  </a:lnTo>
+                  <a:lnTo>
+                    <a:pt x="864040" y="2479047"/>
+                  </a:lnTo>
+                  <a:lnTo>
+                    <a:pt x="935663" y="2577419"/>
+                  </a:lnTo>
+                  <a:lnTo>
+                    <a:pt x="1007285" y="2666159"/>
+                  </a:lnTo>
+                  <a:lnTo>
+                    <a:pt x="1078908" y="2746211"/>
+                  </a:lnTo>
+                  <a:lnTo>
+                    <a:pt x="1150530" y="2818424"/>
+                  </a:lnTo>
+                  <a:lnTo>
+                    <a:pt x="1222153" y="2883567"/>
+                  </a:lnTo>
+                  <a:lnTo>
+                    <a:pt x="1293776" y="2942332"/>
+                  </a:lnTo>
+                  <a:lnTo>
+                    <a:pt x="1365398" y="2995343"/>
+                  </a:lnTo>
+                  <a:lnTo>
+                    <a:pt x="1437021" y="3043163"/>
+                  </a:lnTo>
+                  <a:lnTo>
+                    <a:pt x="1508643" y="3086302"/>
+                  </a:lnTo>
+                  <a:lnTo>
+                    <a:pt x="1580266" y="3125216"/>
+                  </a:lnTo>
+                  <a:lnTo>
+                    <a:pt x="1651888" y="3160321"/>
+                  </a:lnTo>
+                  <a:lnTo>
+                    <a:pt x="1723511" y="3191988"/>
+                  </a:lnTo>
+                  <a:lnTo>
+                    <a:pt x="1795133" y="3220555"/>
+                  </a:lnTo>
+                  <a:lnTo>
+                    <a:pt x="1866756" y="3246324"/>
+                  </a:lnTo>
+                  <a:lnTo>
+                    <a:pt x="1938378" y="3269571"/>
+                  </a:lnTo>
+                  <a:lnTo>
+                    <a:pt x="2010001" y="3290541"/>
+                  </a:lnTo>
+                  <a:lnTo>
+                    <a:pt x="2081623" y="3309458"/>
+                  </a:lnTo>
+                  <a:lnTo>
+                    <a:pt x="2153246" y="3326523"/>
+                  </a:lnTo>
+                  <a:lnTo>
+                    <a:pt x="2224868" y="3341917"/>
+                  </a:lnTo>
+                  <a:lnTo>
+                    <a:pt x="2296491" y="3355804"/>
+                  </a:lnTo>
+                  <a:lnTo>
+                    <a:pt x="2368113" y="3368331"/>
+                  </a:lnTo>
+                  <a:lnTo>
+                    <a:pt x="2439736" y="3379631"/>
+                  </a:lnTo>
+                  <a:lnTo>
+                    <a:pt x="2511358" y="3389826"/>
+                  </a:lnTo>
+                  <a:lnTo>
+                    <a:pt x="2582981" y="3399022"/>
+                  </a:lnTo>
+                  <a:lnTo>
+                    <a:pt x="2654604" y="3407317"/>
+                  </a:lnTo>
+                  <a:lnTo>
+                    <a:pt x="2726226" y="3414800"/>
+                  </a:lnTo>
+                  <a:lnTo>
+                    <a:pt x="2797849" y="3421551"/>
+                  </a:lnTo>
+                  <a:lnTo>
+                    <a:pt x="2869471" y="3427641"/>
+                  </a:lnTo>
+                  <a:lnTo>
+                    <a:pt x="2941094" y="3433134"/>
+                  </a:lnTo>
+                  <a:lnTo>
+                    <a:pt x="3012716" y="3438090"/>
+                  </a:lnTo>
+                  <a:lnTo>
+                    <a:pt x="3084339" y="3442560"/>
+                  </a:lnTo>
+                  <a:lnTo>
+                    <a:pt x="3155961" y="3446593"/>
+                  </a:lnTo>
+                  <a:lnTo>
+                    <a:pt x="3227584" y="3450230"/>
+                  </a:lnTo>
+                  <a:lnTo>
+                    <a:pt x="3299206" y="3453512"/>
+                  </a:lnTo>
+                  <a:lnTo>
+                    <a:pt x="3370829" y="3456472"/>
+                  </a:lnTo>
+                  <a:lnTo>
+                    <a:pt x="3442451" y="3459143"/>
+                  </a:lnTo>
+                  <a:lnTo>
+                    <a:pt x="3514074" y="3461552"/>
+                  </a:lnTo>
+                  <a:lnTo>
+                    <a:pt x="3585696" y="3463725"/>
+                  </a:lnTo>
+                  <a:lnTo>
+                    <a:pt x="3657319" y="3465685"/>
+                  </a:lnTo>
+                  <a:lnTo>
+                    <a:pt x="3728941" y="3467454"/>
+                  </a:lnTo>
+                  <a:lnTo>
+                    <a:pt x="3800564" y="3469049"/>
+                  </a:lnTo>
+                  <a:lnTo>
+                    <a:pt x="3872186" y="3470488"/>
+                  </a:lnTo>
+                  <a:lnTo>
+                    <a:pt x="3943809" y="3471786"/>
+                  </a:lnTo>
+                  <a:lnTo>
+                    <a:pt x="4015432" y="3472957"/>
+                  </a:lnTo>
+                  <a:lnTo>
+                    <a:pt x="4087054" y="3474014"/>
+                  </a:lnTo>
+                  <a:lnTo>
+                    <a:pt x="4158677" y="3474967"/>
+                  </a:lnTo>
+                  <a:lnTo>
+                    <a:pt x="4230299" y="3475826"/>
+                  </a:lnTo>
+                  <a:lnTo>
+                    <a:pt x="4301922" y="3476602"/>
+                  </a:lnTo>
+                  <a:lnTo>
+                    <a:pt x="4373544" y="3477301"/>
+                  </a:lnTo>
+                  <a:lnTo>
+                    <a:pt x="4445167" y="3477932"/>
+                  </a:lnTo>
+                  <a:lnTo>
+                    <a:pt x="4516789" y="3478502"/>
+                  </a:lnTo>
+                  <a:lnTo>
+                    <a:pt x="4588412" y="3479015"/>
+                  </a:lnTo>
+                  <a:lnTo>
+                    <a:pt x="4660034" y="3479478"/>
+                  </a:lnTo>
+                  <a:lnTo>
+                    <a:pt x="4731657" y="3479896"/>
+                  </a:lnTo>
+                  <a:lnTo>
+                    <a:pt x="4803279" y="3480273"/>
+                  </a:lnTo>
+                  <a:lnTo>
+                    <a:pt x="4874902" y="3480613"/>
+                  </a:lnTo>
+                  <a:lnTo>
+                    <a:pt x="4946524" y="3480920"/>
+                  </a:lnTo>
+                  <a:lnTo>
+                    <a:pt x="5018147" y="3481197"/>
+                  </a:lnTo>
+                  <a:lnTo>
+                    <a:pt x="5089769" y="3481446"/>
                   </a:lnTo>
                 </a:path>
               </a:pathLst>
@@ -4630,7 +4624,7 @@
           </p:nvSpPr>
           <p:spPr>
             <a:xfrm>
-              <a:off x="4164901" y="2073503"/>
+              <a:off x="4170171" y="2073503"/>
               <a:ext cx="0" cy="3649639"/>
             </a:xfrm>
             <a:custGeom>
@@ -4903,7 +4897,7 @@
           </p:nvSpPr>
           <p:spPr>
             <a:xfrm>
-              <a:off x="1382692" y="5785772"/>
+              <a:off x="1383511" y="5785772"/>
               <a:ext cx="161574" cy="80101"/>
             </a:xfrm>
             <a:prstGeom prst="rect">
@@ -4949,7 +4943,7 @@
           </p:nvSpPr>
           <p:spPr>
             <a:xfrm>
-              <a:off x="2284877" y="5785772"/>
+              <a:off x="2285456" y="5785772"/>
               <a:ext cx="161574" cy="80101"/>
             </a:xfrm>
             <a:prstGeom prst="rect">
@@ -4995,7 +4989,7 @@
           </p:nvSpPr>
           <p:spPr>
             <a:xfrm>
-              <a:off x="3187061" y="5785772"/>
+              <a:off x="3187401" y="5785772"/>
               <a:ext cx="161574" cy="80101"/>
             </a:xfrm>
             <a:prstGeom prst="rect">
@@ -5041,7 +5035,7 @@
           </p:nvSpPr>
           <p:spPr>
             <a:xfrm>
-              <a:off x="4138944" y="5785772"/>
+              <a:off x="4139043" y="5785772"/>
               <a:ext cx="62179" cy="80101"/>
             </a:xfrm>
             <a:prstGeom prst="rect">
@@ -5087,7 +5081,7 @@
           </p:nvSpPr>
           <p:spPr>
             <a:xfrm>
-              <a:off x="5010039" y="5785772"/>
+              <a:off x="5009898" y="5785772"/>
               <a:ext cx="124358" cy="80101"/>
             </a:xfrm>
             <a:prstGeom prst="rect">
@@ -5133,7 +5127,7 @@
           </p:nvSpPr>
           <p:spPr>
             <a:xfrm>
-              <a:off x="5912223" y="5785772"/>
+              <a:off x="5911843" y="5785772"/>
               <a:ext cx="124358" cy="80101"/>
             </a:xfrm>
             <a:prstGeom prst="rect">
@@ -5179,7 +5173,7 @@
           </p:nvSpPr>
           <p:spPr>
             <a:xfrm>
-              <a:off x="6814408" y="5785772"/>
+              <a:off x="6813788" y="5785772"/>
               <a:ext cx="124358" cy="80101"/>
             </a:xfrm>
             <a:prstGeom prst="rect">
@@ -5225,7 +5219,7 @@
           </p:nvSpPr>
           <p:spPr>
             <a:xfrm>
-              <a:off x="7716592" y="5785772"/>
+              <a:off x="7715733" y="5785772"/>
               <a:ext cx="124358" cy="80101"/>
             </a:xfrm>
             <a:prstGeom prst="rect">
@@ -5396,7 +5390,7 @@
                   <a:latin typeface="Helvetica"/>
                   <a:cs typeface="Helvetica"/>
                 </a:rPr>
-                <a:t>subHR per 10 % decline: 3.66 (0.59-22.64), p_Bonf = 0.977 (n = 6)  |  per IQR decline (Δ = 27.4 %): 35.22 (0.24-5233.65)  |  IQR: [-12.6, 14.8] %</a:t>
+                <a:t>subHR per 10 % decline: 3.66 (0.59-22.64), p_Bonf = 0.977 (n = 6)  |  per IQR decline (Δ = 27.2 %): 34.18 (0.24-4871.16)  |  IQR: [-12.3, 14.9] %</a:t>
               </a:r>
             </a:p>
           </p:txBody>
